--- a/outputs/ophthalmology-batch-20261011/pediatric/algorithm_editable.pptx
+++ b/outputs/ophthalmology-batch-20261011/pediatric/algorithm_editable.pptx
@@ -630,7 +630,7 @@
           <a:p/>
           <a:p>
             <a:r>
-              <a:t>pediatric-09 心率降幅&gt;50%：立即移除斜视钩并暂停；未恢复增强局麻，再无效静推阿托品0.1~0.3 mg，心率正常后继续；由麻醉/心内医师处理。</a:t>
+              <a:t>pediatric-09 心率降幅&gt;50%：立即移除斜视钩并暂停；未恢复增强局麻，再无效静推阿托品0.1~0.3 mg，心率恢复正常后继续；由麻醉/心内医师处理。</a:t>
             </a:r>
           </a:p>
           <a:p>
@@ -710,7 +710,7 @@
           <a:p/>
           <a:p>
             <a:r>
-              <a:t>pediatric-14 外斜术后过矫：伴复视可1~4周交替遮盖；4周仍内斜 → 麻痹验光、远视足矫/必要棱镜，高AC/A双光。连续内斜&gt;6月等情况考虑二次手术/肉毒毒素。</a:t>
+              <a:t>pediatric-14 外斜术后过矫：伴复视可1~4周交替遮盖；4周仍内斜 → 睫状肌麻痹验光、远视足矫/必要棱镜，高AC/A双光。连续内斜&gt;6月等情况考虑二次手术/肉毒毒素。</a:t>
             </a:r>
           </a:p>
           <a:p>
@@ -726,7 +726,7 @@
           <a:p/>
           <a:p>
             <a:r>
-              <a:t>pediatric-15 欠矫处理：外斜欠矫足矫近视/屈光参差、视功能训练；控制好观察，控制差可术后6周二次手术。内斜欠矫麻痹验光、远视足矫/双光及治弱视。</a:t>
+              <a:t>pediatric-15 欠矫处理：外斜欠矫足矫近视/屈光参差、视功能训练；控制好观察，控制差可术后6周二次手术。内斜欠矫睫状肌麻痹验光、远视足矫/双光及治弱视。</a:t>
             </a:r>
           </a:p>
           <a:p>
@@ -758,7 +758,7 @@
           <a:p/>
           <a:p>
             <a:r>
-              <a:t>pediatric-18 肌肉滑脱识别：术后眼位异常、运动受限、扫视减慢应疑滑脱；MRI/回弹试验辅助，术探透见试验阳性确诊；二次寻找实体肌并重固定。</a:t>
+              <a:t>pediatric-18 肌肉滑脱识别：术后眼位异常、运动受限、扫视减慢应疑滑脱；MRI/回弹试验辅助，术中探查透见试验阳性可确诊；二次寻找实体肌并重固定。</a:t>
             </a:r>
           </a:p>
           <a:p>
@@ -4527,7 +4527,7 @@
       </p:sp>
       <p:sp>
         <p:nvSpPr>
-          <p:cNvPr id="17" name="心率降&lt;20%观察；20%~50%按血压/心率稳定分支；&gt;50%立即移钩暂停。"/>
+          <p:cNvPr id="17" name="心率较基线降幅&lt;20%观察；20%~50%按血压/心率稳定分支；&gt;50%立即移钩暂停。"/>
           <p:cNvSpPr txBox="1"/>
           <p:nvPr/>
         </p:nvSpPr>
@@ -4567,7 +4567,7 @@
                 <a:ea typeface="Microsoft YaHei"/>
                 <a:cs typeface="Microsoft YaHei"/>
               </a:rPr>
-              <a:t>心率降&lt;20%观察；20%~50%按血压/心率稳定分支；</a:t>
+              <a:t>心率较基线降幅&lt;20%观察；20%~50%按血压/心率稳</a:t>
             </a:r>
           </a:p>
           <a:p>
@@ -4591,7 +4591,7 @@
                 <a:ea typeface="Microsoft YaHei"/>
                 <a:cs typeface="Microsoft YaHei"/>
               </a:rPr>
-              <a:t>&gt;50%立即移钩暂停。</a:t>
+              <a:t>定分支；&gt;50%立即移钩暂停。</a:t>
             </a:r>
           </a:p>
         </p:txBody>
@@ -5265,7 +5265,7 @@
       </p:sp>
       <p:sp>
         <p:nvSpPr>
-          <p:cNvPr id="32" name="不双眼包眼；1周首测用药眼压；1天、1周、1/3/6月后每半年；过/欠矫按原文独立分支。"/>
+          <p:cNvPr id="32" name="不双眼包眼；1周首测用药眼压；1天、1周、第1、3、6个月后每半年；过/欠矫按原文独立分支。"/>
           <p:cNvSpPr txBox="1"/>
           <p:nvPr/>
         </p:nvSpPr>
@@ -5305,7 +5305,7 @@
                 <a:ea typeface="Microsoft YaHei"/>
                 <a:cs typeface="Microsoft YaHei"/>
               </a:rPr>
-              <a:t>不双眼包眼；1周首测用药眼压；1天、1周、1/3/6月后</a:t>
+              <a:t>不双眼包眼；1周首测用药眼压；1天、1周、第1、3、6</a:t>
             </a:r>
           </a:p>
           <a:p>
@@ -5329,7 +5329,7 @@
                 <a:ea typeface="Microsoft YaHei"/>
                 <a:cs typeface="Microsoft YaHei"/>
               </a:rPr>
-              <a:t>每半年；过/欠矫按原文独立分支。</a:t>
+              <a:t>个月后每半年；过/欠矫按原文独立分支。</a:t>
             </a:r>
           </a:p>
         </p:txBody>
